--- a/Digital Health Card PPT.pptx
+++ b/Digital Health Card PPT.pptx
@@ -638,7 +638,7 @@
           <a:p>
             <a:fld id="{120C8855-6882-4AD7-B13D-6553AEF0D6D0}" type="datetimeFigureOut">
               <a:rPr lang="en-IN" smtClean="0"/>
-              <a:t>01-02-2026</a:t>
+              <a:t>03-02-2026</a:t>
             </a:fld>
             <a:endParaRPr lang="en-IN"/>
           </a:p>
@@ -934,7 +934,7 @@
           <a:p>
             <a:fld id="{120C8855-6882-4AD7-B13D-6553AEF0D6D0}" type="datetimeFigureOut">
               <a:rPr lang="en-IN" smtClean="0"/>
-              <a:t>01-02-2026</a:t>
+              <a:t>03-02-2026</a:t>
             </a:fld>
             <a:endParaRPr lang="en-IN"/>
           </a:p>
@@ -1182,7 +1182,7 @@
           <a:p>
             <a:fld id="{120C8855-6882-4AD7-B13D-6553AEF0D6D0}" type="datetimeFigureOut">
               <a:rPr lang="en-IN" smtClean="0"/>
-              <a:t>01-02-2026</a:t>
+              <a:t>03-02-2026</a:t>
             </a:fld>
             <a:endParaRPr lang="en-IN"/>
           </a:p>
@@ -1722,7 +1722,7 @@
           <a:p>
             <a:fld id="{120C8855-6882-4AD7-B13D-6553AEF0D6D0}" type="datetimeFigureOut">
               <a:rPr lang="en-IN" smtClean="0"/>
-              <a:t>01-02-2026</a:t>
+              <a:t>03-02-2026</a:t>
             </a:fld>
             <a:endParaRPr lang="en-IN"/>
           </a:p>
@@ -1970,7 +1970,7 @@
           <a:p>
             <a:fld id="{120C8855-6882-4AD7-B13D-6553AEF0D6D0}" type="datetimeFigureOut">
               <a:rPr lang="en-IN" smtClean="0"/>
-              <a:t>01-02-2026</a:t>
+              <a:t>03-02-2026</a:t>
             </a:fld>
             <a:endParaRPr lang="en-IN"/>
           </a:p>
@@ -2502,7 +2502,7 @@
           <a:p>
             <a:fld id="{120C8855-6882-4AD7-B13D-6553AEF0D6D0}" type="datetimeFigureOut">
               <a:rPr lang="en-IN" smtClean="0"/>
-              <a:t>01-02-2026</a:t>
+              <a:t>03-02-2026</a:t>
             </a:fld>
             <a:endParaRPr lang="en-IN"/>
           </a:p>
@@ -2799,7 +2799,7 @@
           <a:p>
             <a:fld id="{120C8855-6882-4AD7-B13D-6553AEF0D6D0}" type="datetimeFigureOut">
               <a:rPr lang="en-IN" smtClean="0"/>
-              <a:t>01-02-2026</a:t>
+              <a:t>03-02-2026</a:t>
             </a:fld>
             <a:endParaRPr lang="en-IN"/>
           </a:p>
@@ -2973,7 +2973,7 @@
           <a:p>
             <a:fld id="{120C8855-6882-4AD7-B13D-6553AEF0D6D0}" type="datetimeFigureOut">
               <a:rPr lang="en-IN" smtClean="0"/>
-              <a:t>01-02-2026</a:t>
+              <a:t>03-02-2026</a:t>
             </a:fld>
             <a:endParaRPr lang="en-IN"/>
           </a:p>
@@ -3153,7 +3153,7 @@
           <a:p>
             <a:fld id="{120C8855-6882-4AD7-B13D-6553AEF0D6D0}" type="datetimeFigureOut">
               <a:rPr lang="en-IN" smtClean="0"/>
-              <a:t>01-02-2026</a:t>
+              <a:t>03-02-2026</a:t>
             </a:fld>
             <a:endParaRPr lang="en-IN"/>
           </a:p>
@@ -3323,7 +3323,7 @@
           <a:p>
             <a:fld id="{120C8855-6882-4AD7-B13D-6553AEF0D6D0}" type="datetimeFigureOut">
               <a:rPr lang="en-IN" smtClean="0"/>
-              <a:t>01-02-2026</a:t>
+              <a:t>03-02-2026</a:t>
             </a:fld>
             <a:endParaRPr lang="en-IN"/>
           </a:p>
@@ -3574,7 +3574,7 @@
           <a:p>
             <a:fld id="{120C8855-6882-4AD7-B13D-6553AEF0D6D0}" type="datetimeFigureOut">
               <a:rPr lang="en-IN" smtClean="0"/>
-              <a:t>01-02-2026</a:t>
+              <a:t>03-02-2026</a:t>
             </a:fld>
             <a:endParaRPr lang="en-IN"/>
           </a:p>
@@ -3871,7 +3871,7 @@
           <a:p>
             <a:fld id="{120C8855-6882-4AD7-B13D-6553AEF0D6D0}" type="datetimeFigureOut">
               <a:rPr lang="en-IN" smtClean="0"/>
-              <a:t>01-02-2026</a:t>
+              <a:t>03-02-2026</a:t>
             </a:fld>
             <a:endParaRPr lang="en-IN"/>
           </a:p>
@@ -4313,7 +4313,7 @@
           <a:p>
             <a:fld id="{120C8855-6882-4AD7-B13D-6553AEF0D6D0}" type="datetimeFigureOut">
               <a:rPr lang="en-IN" smtClean="0"/>
-              <a:t>01-02-2026</a:t>
+              <a:t>03-02-2026</a:t>
             </a:fld>
             <a:endParaRPr lang="en-IN"/>
           </a:p>
@@ -4431,7 +4431,7 @@
           <a:p>
             <a:fld id="{120C8855-6882-4AD7-B13D-6553AEF0D6D0}" type="datetimeFigureOut">
               <a:rPr lang="en-IN" smtClean="0"/>
-              <a:t>01-02-2026</a:t>
+              <a:t>03-02-2026</a:t>
             </a:fld>
             <a:endParaRPr lang="en-IN"/>
           </a:p>
@@ -4526,7 +4526,7 @@
           <a:p>
             <a:fld id="{120C8855-6882-4AD7-B13D-6553AEF0D6D0}" type="datetimeFigureOut">
               <a:rPr lang="en-IN" smtClean="0"/>
-              <a:t>01-02-2026</a:t>
+              <a:t>03-02-2026</a:t>
             </a:fld>
             <a:endParaRPr lang="en-IN"/>
           </a:p>
@@ -4809,7 +4809,7 @@
           <a:p>
             <a:fld id="{120C8855-6882-4AD7-B13D-6553AEF0D6D0}" type="datetimeFigureOut">
               <a:rPr lang="en-IN" smtClean="0"/>
-              <a:t>01-02-2026</a:t>
+              <a:t>03-02-2026</a:t>
             </a:fld>
             <a:endParaRPr lang="en-IN"/>
           </a:p>
@@ -5100,7 +5100,7 @@
           <a:p>
             <a:fld id="{120C8855-6882-4AD7-B13D-6553AEF0D6D0}" type="datetimeFigureOut">
               <a:rPr lang="en-IN" smtClean="0"/>
-              <a:t>01-02-2026</a:t>
+              <a:t>03-02-2026</a:t>
             </a:fld>
             <a:endParaRPr lang="en-IN"/>
           </a:p>
@@ -5630,7 +5630,7 @@
           <a:p>
             <a:fld id="{120C8855-6882-4AD7-B13D-6553AEF0D6D0}" type="datetimeFigureOut">
               <a:rPr lang="en-IN" smtClean="0"/>
-              <a:t>01-02-2026</a:t>
+              <a:t>03-02-2026</a:t>
             </a:fld>
             <a:endParaRPr lang="en-IN"/>
           </a:p>
@@ -6173,8 +6173,8 @@
         </p:nvSpPr>
         <p:spPr>
           <a:xfrm>
-            <a:off x="2756199" y="2266681"/>
-            <a:ext cx="6118677" cy="895512"/>
+            <a:off x="3361508" y="2256043"/>
+            <a:ext cx="5602190" cy="895512"/>
           </a:xfrm>
         </p:spPr>
         <p:txBody>
@@ -6682,33 +6682,8 @@
                 <a:latin typeface="Times New Roman" panose="02020603050405020304" pitchFamily="18" charset="0"/>
                 <a:cs typeface="Times New Roman" panose="02020603050405020304" pitchFamily="18" charset="0"/>
               </a:rPr>
-              <a:t>, which limits scalability</a:t>
-            </a:r>
-            <a:r>
-              <a:rPr kumimoji="0" lang="en-US" sz="2000" b="0" i="0" u="none" strike="noStrike" cap="none" normalizeH="0" baseline="0" dirty="0" smtClean="0">
-                <a:ln>
-                  <a:noFill/>
-                </a:ln>
-                <a:solidFill>
-                  <a:schemeClr val="tx1"/>
-                </a:solidFill>
-                <a:effectLst/>
-                <a:latin typeface="Times New Roman" panose="02020603050405020304" pitchFamily="18" charset="0"/>
-                <a:cs typeface="Times New Roman" panose="02020603050405020304" pitchFamily="18" charset="0"/>
-              </a:rPr>
-              <a:t>.</a:t>
-            </a:r>
-            <a:endParaRPr kumimoji="0" lang="en-US" sz="2000" b="0" i="0" u="none" strike="noStrike" cap="none" normalizeH="0" baseline="0" dirty="0" smtClean="0">
-              <a:ln>
-                <a:noFill/>
-              </a:ln>
-              <a:solidFill>
-                <a:schemeClr val="tx1"/>
-              </a:solidFill>
-              <a:effectLst/>
-              <a:latin typeface="Times New Roman" panose="02020603050405020304" pitchFamily="18" charset="0"/>
-              <a:cs typeface="Times New Roman" panose="02020603050405020304" pitchFamily="18" charset="0"/>
-            </a:endParaRPr>
+              <a:t>, which limits scalability.</a:t>
+            </a:r>
           </a:p>
           <a:p>
             <a:pPr marL="0" marR="0" lvl="0" indent="0" algn="l" defTabSz="914400" rtl="0" eaLnBrk="0" fontAlgn="base" latinLnBrk="0" hangingPunct="0">
@@ -8152,7 +8127,7 @@
       </p:sp>
       <p:pic>
         <p:nvPicPr>
-          <p:cNvPr id="1026" name="Picture 2" descr="DFD2Diagram"/>
+          <p:cNvPr id="2" name="Picture 2" descr="DFD2Diagram"/>
           <p:cNvPicPr>
             <a:picLocks noChangeAspect="1" noChangeArrowheads="1"/>
           </p:cNvPicPr>
@@ -8173,8 +8148,8 @@
         </p:blipFill>
         <p:spPr bwMode="auto">
           <a:xfrm>
-            <a:off x="1313645" y="1532586"/>
-            <a:ext cx="10019763" cy="4971245"/>
+            <a:off x="1262131" y="1648496"/>
+            <a:ext cx="9916732" cy="5209504"/>
           </a:xfrm>
           <a:prstGeom prst="rect">
             <a:avLst/>
@@ -8272,7 +8247,7 @@
       </p:sp>
       <p:pic>
         <p:nvPicPr>
-          <p:cNvPr id="2051" name="Picture 3" descr="ER2drawio (2)"/>
+          <p:cNvPr id="2050" name="Picture 2" descr="ER3Diagram"/>
           <p:cNvPicPr>
             <a:picLocks noChangeAspect="1" noChangeArrowheads="1"/>
           </p:cNvPicPr>
@@ -8293,8 +8268,8 @@
         </p:blipFill>
         <p:spPr bwMode="auto">
           <a:xfrm>
-            <a:off x="1571223" y="1041595"/>
-            <a:ext cx="10393250" cy="5642540"/>
+            <a:off x="746975" y="1313645"/>
+            <a:ext cx="10895526" cy="5409127"/>
           </a:xfrm>
           <a:prstGeom prst="rect">
             <a:avLst/>
@@ -8655,7 +8630,7 @@
       </p:sp>
       <p:pic>
         <p:nvPicPr>
-          <p:cNvPr id="4098" name="Picture 2" descr="class2Diagram"/>
+          <p:cNvPr id="3074" name="Picture 2" descr="Class3Diagram"/>
           <p:cNvPicPr>
             <a:picLocks noChangeAspect="1" noChangeArrowheads="1"/>
           </p:cNvPicPr>
@@ -8676,8 +8651,8 @@
         </p:blipFill>
         <p:spPr bwMode="auto">
           <a:xfrm>
-            <a:off x="1416676" y="1152525"/>
-            <a:ext cx="10174310" cy="5705475"/>
+            <a:off x="1468193" y="1326524"/>
+            <a:ext cx="10290218" cy="5280338"/>
           </a:xfrm>
           <a:prstGeom prst="rect">
             <a:avLst/>
@@ -9848,14 +9823,7 @@
                 <a:latin typeface="Times New Roman" panose="02020603050405020304" pitchFamily="18" charset="0"/>
                 <a:cs typeface="Times New Roman" panose="02020603050405020304" pitchFamily="18" charset="0"/>
               </a:rPr>
-              <a:t>four</a:t>
-            </a:r>
-            <a:r>
-              <a:rPr lang="en-US" sz="2000" dirty="0" smtClean="0">
-                <a:latin typeface="Times New Roman" panose="02020603050405020304" pitchFamily="18" charset="0"/>
-                <a:cs typeface="Times New Roman" panose="02020603050405020304" pitchFamily="18" charset="0"/>
-              </a:rPr>
-              <a:t> </a:t>
+              <a:t>four </a:t>
             </a:r>
             <a:r>
               <a:rPr lang="en-US" sz="2000" dirty="0">
@@ -10877,33 +10845,8 @@
                 <a:latin typeface="Times New Roman" panose="02020603050405020304" pitchFamily="18" charset="0"/>
                 <a:cs typeface="Times New Roman" panose="02020603050405020304" pitchFamily="18" charset="0"/>
               </a:rPr>
-              <a:t> for Admin, Patient, Doctor, Lab </a:t>
-            </a:r>
-            <a:r>
-              <a:rPr kumimoji="0" lang="en-US" sz="2000" b="0" i="0" u="none" strike="noStrike" cap="none" normalizeH="0" baseline="0" dirty="0" smtClean="0">
-                <a:ln>
-                  <a:noFill/>
-                </a:ln>
-                <a:solidFill>
-                  <a:schemeClr val="tx1"/>
-                </a:solidFill>
-                <a:effectLst/>
-                <a:latin typeface="Times New Roman" panose="02020603050405020304" pitchFamily="18" charset="0"/>
-                <a:cs typeface="Times New Roman" panose="02020603050405020304" pitchFamily="18" charset="0"/>
-              </a:rPr>
-              <a:t>Technician.</a:t>
-            </a:r>
-            <a:endParaRPr kumimoji="0" lang="en-US" sz="2000" b="0" i="0" u="none" strike="noStrike" cap="none" normalizeH="0" baseline="0" dirty="0" smtClean="0">
-              <a:ln>
-                <a:noFill/>
-              </a:ln>
-              <a:solidFill>
-                <a:schemeClr val="tx1"/>
-              </a:solidFill>
-              <a:effectLst/>
-              <a:latin typeface="Times New Roman" panose="02020603050405020304" pitchFamily="18" charset="0"/>
-              <a:cs typeface="Times New Roman" panose="02020603050405020304" pitchFamily="18" charset="0"/>
-            </a:endParaRPr>
+              <a:t> for Admin, Patient, Doctor, Lab Technician.</a:t>
+            </a:r>
           </a:p>
           <a:p>
             <a:pPr marL="0" marR="0" lvl="0" indent="0" algn="l" defTabSz="914400" rtl="0" eaLnBrk="0" fontAlgn="base" latinLnBrk="0" hangingPunct="0">
@@ -11082,33 +11025,8 @@
                 <a:latin typeface="Times New Roman" panose="02020603050405020304" pitchFamily="18" charset="0"/>
                 <a:cs typeface="Times New Roman" panose="02020603050405020304" pitchFamily="18" charset="0"/>
               </a:rPr>
-              <a:t> to doctors for viewing medical records</a:t>
-            </a:r>
-            <a:r>
-              <a:rPr kumimoji="0" lang="en-US" sz="2000" b="0" i="0" u="none" strike="noStrike" cap="none" normalizeH="0" baseline="0" dirty="0" smtClean="0">
-                <a:ln>
-                  <a:noFill/>
-                </a:ln>
-                <a:solidFill>
-                  <a:schemeClr val="tx1"/>
-                </a:solidFill>
-                <a:effectLst/>
-                <a:latin typeface="Times New Roman" panose="02020603050405020304" pitchFamily="18" charset="0"/>
-                <a:cs typeface="Times New Roman" panose="02020603050405020304" pitchFamily="18" charset="0"/>
-              </a:rPr>
-              <a:t>.</a:t>
-            </a:r>
-            <a:endParaRPr kumimoji="0" lang="en-US" sz="2000" b="0" i="0" u="none" strike="noStrike" cap="none" normalizeH="0" baseline="0" dirty="0" smtClean="0">
-              <a:ln>
-                <a:noFill/>
-              </a:ln>
-              <a:solidFill>
-                <a:schemeClr val="tx1"/>
-              </a:solidFill>
-              <a:effectLst/>
-              <a:latin typeface="Times New Roman" panose="02020603050405020304" pitchFamily="18" charset="0"/>
-              <a:cs typeface="Times New Roman" panose="02020603050405020304" pitchFamily="18" charset="0"/>
-            </a:endParaRPr>
+              <a:t> to doctors for viewing medical records.</a:t>
+            </a:r>
           </a:p>
         </p:txBody>
       </p:sp>
